--- a/Calendario2026/Presentaciones/1_DireccionamientoIPv4.pptx
+++ b/Calendario2026/Presentaciones/1_DireccionamientoIPv4.pptx
@@ -141,6 +141,43 @@
 </p:presentation>
 </file>
 
+<file path=ppt/revisionInfo.xml><?xml version="1.0" encoding="utf-8"?>
+<p1510:revInfo xmlns:a="http://schemas.openxmlformats.org/drawingml/2006/main" xmlns:r="http://schemas.openxmlformats.org/officeDocument/2006/relationships" xmlns:p1510="http://schemas.microsoft.com/office/powerpoint/2015/10/main">
+  <p1510:revLst>
+    <p1510:client id="{8D911609-77FB-4981-9021-30B75AC5B797}" v="1" dt="2026-03-23T19:29:53.127"/>
+  </p1510:revLst>
+</p1510:revInfo>
+</file>
+
+<file path=ppt/changesInfos/changesInfo1.xml><?xml version="1.0" encoding="utf-8"?>
+<pc:chgInfo xmlns:a="http://schemas.openxmlformats.org/drawingml/2006/main" xmlns:r="http://schemas.openxmlformats.org/officeDocument/2006/relationships" xmlns:ac="http://schemas.microsoft.com/office/drawing/2013/main/command" xmlns:pc="http://schemas.microsoft.com/office/powerpoint/2013/main/command">
+  <pc:docChgLst>
+    <pc:chgData name="Lizethe Pérez Fuertes" userId="4ae9ef87-2a7d-42f8-8dfa-0a501a9e2ff4" providerId="ADAL" clId="{FDDD45CB-1330-4033-A842-3D2746AFF7C7}"/>
+    <pc:docChg chg="modSld">
+      <pc:chgData name="Lizethe Pérez Fuertes" userId="4ae9ef87-2a7d-42f8-8dfa-0a501a9e2ff4" providerId="ADAL" clId="{FDDD45CB-1330-4033-A842-3D2746AFF7C7}" dt="2026-03-23T19:29:53.127" v="0" actId="20577"/>
+      <pc:docMkLst>
+        <pc:docMk/>
+      </pc:docMkLst>
+      <pc:sldChg chg="modSp">
+        <pc:chgData name="Lizethe Pérez Fuertes" userId="4ae9ef87-2a7d-42f8-8dfa-0a501a9e2ff4" providerId="ADAL" clId="{FDDD45CB-1330-4033-A842-3D2746AFF7C7}" dt="2026-03-23T19:29:53.127" v="0" actId="20577"/>
+        <pc:sldMkLst>
+          <pc:docMk/>
+          <pc:sldMk cId="1515272197" sldId="304"/>
+        </pc:sldMkLst>
+        <pc:spChg chg="mod">
+          <ac:chgData name="Lizethe Pérez Fuertes" userId="4ae9ef87-2a7d-42f8-8dfa-0a501a9e2ff4" providerId="ADAL" clId="{FDDD45CB-1330-4033-A842-3D2746AFF7C7}" dt="2026-03-23T19:29:53.127" v="0" actId="20577"/>
+          <ac:spMkLst>
+            <pc:docMk/>
+            <pc:sldMk cId="1515272197" sldId="304"/>
+            <ac:spMk id="7" creationId="{C762E2C6-F53E-DB20-39B8-7C4D866D0524}"/>
+          </ac:spMkLst>
+        </pc:spChg>
+      </pc:sldChg>
+    </pc:docChg>
+  </pc:docChgLst>
+</pc:chgInfo>
+</file>
+
 <file path=ppt/notesMasters/notesMaster1.xml><?xml version="1.0" encoding="utf-8"?>
 <p:notesMaster xmlns:a="http://schemas.openxmlformats.org/drawingml/2006/main" xmlns:r="http://schemas.openxmlformats.org/officeDocument/2006/relationships" xmlns:p="http://schemas.openxmlformats.org/presentationml/2006/main">
   <p:cSld>
@@ -223,7 +260,7 @@
           <a:p>
             <a:fld id="{2D445F07-8756-451B-A938-0248325FC7BB}" type="datetimeFigureOut">
               <a:rPr lang="es-MX" smtClean="0"/>
-              <a:t>20/03/2025</a:t>
+              <a:t>23/03/2026</a:t>
             </a:fld>
             <a:endParaRPr lang="es-MX" dirty="0"/>
           </a:p>
@@ -382,7 +419,7 @@
           <a:p>
             <a:fld id="{5993AEC0-242E-4FA7-9D3C-51E1036AC3CB}" type="slidenum">
               <a:rPr lang="es-MX" smtClean="0"/>
-              <a:t>‹#›</a:t>
+              <a:t>‹Nº›</a:t>
             </a:fld>
             <a:endParaRPr lang="es-MX" dirty="0"/>
           </a:p>
@@ -1317,7 +1354,7 @@
           <a:p>
             <a:fld id="{5E75A0DC-66C6-4CEC-A5EB-F8C97CEC3796}" type="datetimeFigureOut">
               <a:rPr lang="es-MX" smtClean="0"/>
-              <a:t>20/03/2025</a:t>
+              <a:t>23/03/2026</a:t>
             </a:fld>
             <a:endParaRPr lang="es-MX" dirty="0"/>
           </a:p>
@@ -1359,7 +1396,7 @@
           <a:p>
             <a:fld id="{C077EE1E-7A06-4E7F-9AFB-189FC69B7B0C}" type="slidenum">
               <a:rPr lang="es-MX" smtClean="0"/>
-              <a:t>‹#›</a:t>
+              <a:t>‹Nº›</a:t>
             </a:fld>
             <a:endParaRPr lang="es-MX" dirty="0"/>
           </a:p>
@@ -1487,7 +1524,7 @@
           <a:p>
             <a:fld id="{5E75A0DC-66C6-4CEC-A5EB-F8C97CEC3796}" type="datetimeFigureOut">
               <a:rPr lang="es-MX" smtClean="0"/>
-              <a:t>20/03/2025</a:t>
+              <a:t>23/03/2026</a:t>
             </a:fld>
             <a:endParaRPr lang="es-MX" dirty="0"/>
           </a:p>
@@ -1529,7 +1566,7 @@
           <a:p>
             <a:fld id="{C077EE1E-7A06-4E7F-9AFB-189FC69B7B0C}" type="slidenum">
               <a:rPr lang="es-MX" smtClean="0"/>
-              <a:t>‹#›</a:t>
+              <a:t>‹Nº›</a:t>
             </a:fld>
             <a:endParaRPr lang="es-MX" dirty="0"/>
           </a:p>
@@ -1667,7 +1704,7 @@
           <a:p>
             <a:fld id="{5E75A0DC-66C6-4CEC-A5EB-F8C97CEC3796}" type="datetimeFigureOut">
               <a:rPr lang="es-MX" smtClean="0"/>
-              <a:t>20/03/2025</a:t>
+              <a:t>23/03/2026</a:t>
             </a:fld>
             <a:endParaRPr lang="es-MX" dirty="0"/>
           </a:p>
@@ -1709,7 +1746,7 @@
           <a:p>
             <a:fld id="{C077EE1E-7A06-4E7F-9AFB-189FC69B7B0C}" type="slidenum">
               <a:rPr lang="es-MX" smtClean="0"/>
-              <a:t>‹#›</a:t>
+              <a:t>‹Nº›</a:t>
             </a:fld>
             <a:endParaRPr lang="es-MX" dirty="0"/>
           </a:p>
@@ -1837,7 +1874,7 @@
           <a:p>
             <a:fld id="{5E75A0DC-66C6-4CEC-A5EB-F8C97CEC3796}" type="datetimeFigureOut">
               <a:rPr lang="es-MX" smtClean="0"/>
-              <a:t>20/03/2025</a:t>
+              <a:t>23/03/2026</a:t>
             </a:fld>
             <a:endParaRPr lang="es-MX" dirty="0"/>
           </a:p>
@@ -1879,7 +1916,7 @@
           <a:p>
             <a:fld id="{C077EE1E-7A06-4E7F-9AFB-189FC69B7B0C}" type="slidenum">
               <a:rPr lang="es-MX" smtClean="0"/>
-              <a:t>‹#›</a:t>
+              <a:t>‹Nº›</a:t>
             </a:fld>
             <a:endParaRPr lang="es-MX" dirty="0"/>
           </a:p>
@@ -2083,7 +2120,7 @@
           <a:p>
             <a:fld id="{5E75A0DC-66C6-4CEC-A5EB-F8C97CEC3796}" type="datetimeFigureOut">
               <a:rPr lang="es-MX" smtClean="0"/>
-              <a:t>20/03/2025</a:t>
+              <a:t>23/03/2026</a:t>
             </a:fld>
             <a:endParaRPr lang="es-MX" dirty="0"/>
           </a:p>
@@ -2125,7 +2162,7 @@
           <a:p>
             <a:fld id="{C077EE1E-7A06-4E7F-9AFB-189FC69B7B0C}" type="slidenum">
               <a:rPr lang="es-MX" smtClean="0"/>
-              <a:t>‹#›</a:t>
+              <a:t>‹Nº›</a:t>
             </a:fld>
             <a:endParaRPr lang="es-MX" dirty="0"/>
           </a:p>
@@ -2371,7 +2408,7 @@
           <a:p>
             <a:fld id="{5E75A0DC-66C6-4CEC-A5EB-F8C97CEC3796}" type="datetimeFigureOut">
               <a:rPr lang="es-MX" smtClean="0"/>
-              <a:t>20/03/2025</a:t>
+              <a:t>23/03/2026</a:t>
             </a:fld>
             <a:endParaRPr lang="es-MX" dirty="0"/>
           </a:p>
@@ -2413,7 +2450,7 @@
           <a:p>
             <a:fld id="{C077EE1E-7A06-4E7F-9AFB-189FC69B7B0C}" type="slidenum">
               <a:rPr lang="es-MX" smtClean="0"/>
-              <a:t>‹#›</a:t>
+              <a:t>‹Nº›</a:t>
             </a:fld>
             <a:endParaRPr lang="es-MX" dirty="0"/>
           </a:p>
@@ -2793,7 +2830,7 @@
           <a:p>
             <a:fld id="{5E75A0DC-66C6-4CEC-A5EB-F8C97CEC3796}" type="datetimeFigureOut">
               <a:rPr lang="es-MX" smtClean="0"/>
-              <a:t>20/03/2025</a:t>
+              <a:t>23/03/2026</a:t>
             </a:fld>
             <a:endParaRPr lang="es-MX" dirty="0"/>
           </a:p>
@@ -2835,7 +2872,7 @@
           <a:p>
             <a:fld id="{C077EE1E-7A06-4E7F-9AFB-189FC69B7B0C}" type="slidenum">
               <a:rPr lang="es-MX" smtClean="0"/>
-              <a:t>‹#›</a:t>
+              <a:t>‹Nº›</a:t>
             </a:fld>
             <a:endParaRPr lang="es-MX" dirty="0"/>
           </a:p>
@@ -2911,7 +2948,7 @@
           <a:p>
             <a:fld id="{5E75A0DC-66C6-4CEC-A5EB-F8C97CEC3796}" type="datetimeFigureOut">
               <a:rPr lang="es-MX" smtClean="0"/>
-              <a:t>20/03/2025</a:t>
+              <a:t>23/03/2026</a:t>
             </a:fld>
             <a:endParaRPr lang="es-MX" dirty="0"/>
           </a:p>
@@ -2953,7 +2990,7 @@
           <a:p>
             <a:fld id="{C077EE1E-7A06-4E7F-9AFB-189FC69B7B0C}" type="slidenum">
               <a:rPr lang="es-MX" smtClean="0"/>
-              <a:t>‹#›</a:t>
+              <a:t>‹Nº›</a:t>
             </a:fld>
             <a:endParaRPr lang="es-MX" dirty="0"/>
           </a:p>
@@ -3006,7 +3043,7 @@
           <a:p>
             <a:fld id="{5E75A0DC-66C6-4CEC-A5EB-F8C97CEC3796}" type="datetimeFigureOut">
               <a:rPr lang="es-MX" smtClean="0"/>
-              <a:t>20/03/2025</a:t>
+              <a:t>23/03/2026</a:t>
             </a:fld>
             <a:endParaRPr lang="es-MX" dirty="0"/>
           </a:p>
@@ -3048,7 +3085,7 @@
           <a:p>
             <a:fld id="{C077EE1E-7A06-4E7F-9AFB-189FC69B7B0C}" type="slidenum">
               <a:rPr lang="es-MX" smtClean="0"/>
-              <a:t>‹#›</a:t>
+              <a:t>‹Nº›</a:t>
             </a:fld>
             <a:endParaRPr lang="es-MX" dirty="0"/>
           </a:p>
@@ -3283,7 +3320,7 @@
           <a:p>
             <a:fld id="{5E75A0DC-66C6-4CEC-A5EB-F8C97CEC3796}" type="datetimeFigureOut">
               <a:rPr lang="es-MX" smtClean="0"/>
-              <a:t>20/03/2025</a:t>
+              <a:t>23/03/2026</a:t>
             </a:fld>
             <a:endParaRPr lang="es-MX" dirty="0"/>
           </a:p>
@@ -3325,7 +3362,7 @@
           <a:p>
             <a:fld id="{C077EE1E-7A06-4E7F-9AFB-189FC69B7B0C}" type="slidenum">
               <a:rPr lang="es-MX" smtClean="0"/>
-              <a:t>‹#›</a:t>
+              <a:t>‹Nº›</a:t>
             </a:fld>
             <a:endParaRPr lang="es-MX" dirty="0"/>
           </a:p>
@@ -3536,7 +3573,7 @@
           <a:p>
             <a:fld id="{5E75A0DC-66C6-4CEC-A5EB-F8C97CEC3796}" type="datetimeFigureOut">
               <a:rPr lang="es-MX" smtClean="0"/>
-              <a:t>20/03/2025</a:t>
+              <a:t>23/03/2026</a:t>
             </a:fld>
             <a:endParaRPr lang="es-MX" dirty="0"/>
           </a:p>
@@ -3578,7 +3615,7 @@
           <a:p>
             <a:fld id="{C077EE1E-7A06-4E7F-9AFB-189FC69B7B0C}" type="slidenum">
               <a:rPr lang="es-MX" smtClean="0"/>
-              <a:t>‹#›</a:t>
+              <a:t>‹Nº›</a:t>
             </a:fld>
             <a:endParaRPr lang="es-MX" dirty="0"/>
           </a:p>
@@ -3749,7 +3786,7 @@
           <a:p>
             <a:fld id="{5E75A0DC-66C6-4CEC-A5EB-F8C97CEC3796}" type="datetimeFigureOut">
               <a:rPr lang="es-MX" smtClean="0"/>
-              <a:t>20/03/2025</a:t>
+              <a:t>23/03/2026</a:t>
             </a:fld>
             <a:endParaRPr lang="es-MX" dirty="0"/>
           </a:p>
@@ -3827,7 +3864,7 @@
           <a:p>
             <a:fld id="{C077EE1E-7A06-4E7F-9AFB-189FC69B7B0C}" type="slidenum">
               <a:rPr lang="es-MX" smtClean="0"/>
-              <a:t>‹#›</a:t>
+              <a:t>‹Nº›</a:t>
             </a:fld>
             <a:endParaRPr lang="es-MX" dirty="0"/>
           </a:p>
@@ -8710,8 +8747,21 @@
                   <a:srgbClr val="FF0000"/>
                 </a:solidFill>
               </a:rPr>
-              <a:t>Máscara de subred en binario: 11111111.1111111.11111100.00000000</a:t>
-            </a:r>
+              <a:t>Máscara de subred en binario</a:t>
+            </a:r>
+            <a:r>
+              <a:rPr lang="es-ES" sz="2000" b="1">
+                <a:solidFill>
+                  <a:srgbClr val="FF0000"/>
+                </a:solidFill>
+              </a:rPr>
+              <a:t>: 11111111.11111111.11111100.00000000</a:t>
+            </a:r>
+            <a:endParaRPr lang="es-ES" sz="2000" b="1" dirty="0">
+              <a:solidFill>
+                <a:srgbClr val="FF0000"/>
+              </a:solidFill>
+            </a:endParaRPr>
           </a:p>
           <a:p>
             <a:pPr algn="just">
